--- a/figures/editable/01_时序综述图件/10_TimeSeriesGym_Benchmark.pptx
+++ b/figures/editable/01_时序综述图件/10_TimeSeriesGym_Benchmark.pptx
@@ -1080,7 +1080,7 @@
               </a:extLst>
             </p:cNvPr>
             <p:cNvSpPr>
-              <a:spLocks xmlns:a="http://schemas.openxmlformats.org/drawingml/2006/main" noGrp="1"/>
+              <a:spLocks xmlns:a="http://schemas.openxmlformats.org/drawingml/2006/main"/>
             </p:cNvSpPr>
             <p:nvPr/>
           </p:nvSpPr>
@@ -1115,7 +1115,7 @@
               </a:extLst>
             </p:cNvPr>
             <p:cNvSpPr>
-              <a:spLocks xmlns:a="http://schemas.openxmlformats.org/drawingml/2006/main" noGrp="1"/>
+              <a:spLocks xmlns:a="http://schemas.openxmlformats.org/drawingml/2006/main"/>
             </p:cNvSpPr>
             <p:nvPr/>
           </p:nvSpPr>
@@ -1171,7 +1171,7 @@
               </a:extLst>
             </p:cNvPr>
             <p:cNvSpPr>
-              <a:spLocks xmlns:a="http://schemas.openxmlformats.org/drawingml/2006/main" noGrp="1"/>
+              <a:spLocks xmlns:a="http://schemas.openxmlformats.org/drawingml/2006/main"/>
             </p:cNvSpPr>
             <p:nvPr/>
           </p:nvSpPr>
@@ -1227,7 +1227,7 @@
               </a:extLst>
             </p:cNvPr>
             <p:cNvSpPr>
-              <a:spLocks xmlns:a="http://schemas.openxmlformats.org/drawingml/2006/main" noGrp="1"/>
+              <a:spLocks xmlns:a="http://schemas.openxmlformats.org/drawingml/2006/main"/>
             </p:cNvSpPr>
             <p:nvPr/>
           </p:nvSpPr>
@@ -1262,7 +1262,7 @@
               </a:extLst>
             </p:cNvPr>
             <p:cNvSpPr>
-              <a:spLocks xmlns:a="http://schemas.openxmlformats.org/drawingml/2006/main" noGrp="1"/>
+              <a:spLocks xmlns:a="http://schemas.openxmlformats.org/drawingml/2006/main"/>
             </p:cNvSpPr>
             <p:nvPr/>
           </p:nvSpPr>
@@ -1318,7 +1318,7 @@
               </a:extLst>
             </p:cNvPr>
             <p:cNvSpPr>
-              <a:spLocks xmlns:a="http://schemas.openxmlformats.org/drawingml/2006/main" noGrp="1"/>
+              <a:spLocks xmlns:a="http://schemas.openxmlformats.org/drawingml/2006/main"/>
             </p:cNvSpPr>
             <p:nvPr/>
           </p:nvSpPr>
@@ -1397,7 +1397,7 @@
               </a:extLst>
             </p:cNvPr>
             <p:cNvSpPr>
-              <a:spLocks xmlns:a="http://schemas.openxmlformats.org/drawingml/2006/main" noGrp="1"/>
+              <a:spLocks xmlns:a="http://schemas.openxmlformats.org/drawingml/2006/main"/>
             </p:cNvSpPr>
             <p:nvPr/>
           </p:nvSpPr>
@@ -1432,7 +1432,7 @@
               </a:extLst>
             </p:cNvPr>
             <p:cNvSpPr>
-              <a:spLocks xmlns:a="http://schemas.openxmlformats.org/drawingml/2006/main" noGrp="1"/>
+              <a:spLocks xmlns:a="http://schemas.openxmlformats.org/drawingml/2006/main"/>
             </p:cNvSpPr>
             <p:nvPr/>
           </p:nvSpPr>
@@ -1488,7 +1488,7 @@
               </a:extLst>
             </p:cNvPr>
             <p:cNvSpPr>
-              <a:spLocks xmlns:a="http://schemas.openxmlformats.org/drawingml/2006/main" noGrp="1"/>
+              <a:spLocks xmlns:a="http://schemas.openxmlformats.org/drawingml/2006/main"/>
             </p:cNvSpPr>
             <p:nvPr/>
           </p:nvSpPr>
@@ -1544,7 +1544,7 @@
               </a:extLst>
             </p:cNvPr>
             <p:cNvSpPr>
-              <a:spLocks xmlns:a="http://schemas.openxmlformats.org/drawingml/2006/main" noGrp="1"/>
+              <a:spLocks xmlns:a="http://schemas.openxmlformats.org/drawingml/2006/main"/>
             </p:cNvSpPr>
             <p:nvPr/>
           </p:nvSpPr>
@@ -1579,7 +1579,7 @@
               </a:extLst>
             </p:cNvPr>
             <p:cNvSpPr>
-              <a:spLocks xmlns:a="http://schemas.openxmlformats.org/drawingml/2006/main" noGrp="1"/>
+              <a:spLocks xmlns:a="http://schemas.openxmlformats.org/drawingml/2006/main"/>
             </p:cNvSpPr>
             <p:nvPr/>
           </p:nvSpPr>
@@ -1635,7 +1635,7 @@
               </a:extLst>
             </p:cNvPr>
             <p:cNvSpPr>
-              <a:spLocks xmlns:a="http://schemas.openxmlformats.org/drawingml/2006/main" noGrp="1"/>
+              <a:spLocks xmlns:a="http://schemas.openxmlformats.org/drawingml/2006/main"/>
             </p:cNvSpPr>
             <p:nvPr/>
           </p:nvSpPr>
@@ -1691,7 +1691,7 @@
               </a:extLst>
             </p:cNvPr>
             <p:cNvSpPr>
-              <a:spLocks xmlns:a="http://schemas.openxmlformats.org/drawingml/2006/main" noGrp="1"/>
+              <a:spLocks xmlns:a="http://schemas.openxmlformats.org/drawingml/2006/main"/>
             </p:cNvSpPr>
             <p:nvPr/>
           </p:nvSpPr>
@@ -1726,7 +1726,7 @@
               </a:extLst>
             </p:cNvPr>
             <p:cNvSpPr>
-              <a:spLocks xmlns:a="http://schemas.openxmlformats.org/drawingml/2006/main" noGrp="1"/>
+              <a:spLocks xmlns:a="http://schemas.openxmlformats.org/drawingml/2006/main"/>
             </p:cNvSpPr>
             <p:nvPr/>
           </p:nvSpPr>
@@ -1782,7 +1782,7 @@
               </a:extLst>
             </p:cNvPr>
             <p:cNvSpPr>
-              <a:spLocks xmlns:a="http://schemas.openxmlformats.org/drawingml/2006/main" noGrp="1"/>
+              <a:spLocks xmlns:a="http://schemas.openxmlformats.org/drawingml/2006/main"/>
             </p:cNvSpPr>
             <p:nvPr/>
           </p:nvSpPr>
@@ -1823,7 +1823,7 @@
                   <a:ea typeface="Times New Roman"/>
                   <a:cs typeface="Times New Roman"/>
                 </a:rPr>
-                <a:t>trace and artifact review</a:t>
+                <a:t>task-specific artifact checks</a:t>
               </a:r>
             </a:p>
           </p:txBody>
@@ -1942,7 +1942,7 @@
               </a:extLst>
             </p:cNvPr>
             <p:cNvSpPr>
-              <a:spLocks xmlns:a="http://schemas.openxmlformats.org/drawingml/2006/main" noGrp="1"/>
+              <a:spLocks xmlns:a="http://schemas.openxmlformats.org/drawingml/2006/main"/>
             </p:cNvSpPr>
             <p:nvPr/>
           </p:nvSpPr>
